--- a/examples/licoes-aprendidas.pptx
+++ b/examples/licoes-aprendidas.pptx
@@ -4021,7 +4021,7 @@
           <a:p>
             <a:pPr algn="l"/>
             <a:r>
-              <a:rPr sz="4000" b="1" i="0">
+              <a:rPr sz="3400" b="1" i="0">
                 <a:solidFill>
                   <a:srgbClr val="333333"/>
                 </a:solidFill>

--- a/examples/licoes-aprendidas.pptx
+++ b/examples/licoes-aprendidas.pptx
@@ -3154,8 +3154,8 @@
         </p:nvSpPr>
         <p:spPr>
           <a:xfrm>
-            <a:off x="731520" y="2194560"/>
-            <a:ext cx="10698480" cy="1463040"/>
+            <a:off x="731520" y="1920240"/>
+            <a:ext cx="10698480" cy="1737360"/>
           </a:xfrm>
           <a:prstGeom prst="rect">
             <a:avLst/>
@@ -4040,8 +4040,8 @@
         </p:nvSpPr>
         <p:spPr>
           <a:xfrm>
-            <a:off x="594360" y="3337560"/>
-            <a:ext cx="2338578" cy="457200"/>
+            <a:off x="594360" y="3154680"/>
+            <a:ext cx="2338578" cy="411480"/>
           </a:xfrm>
           <a:prstGeom prst="rect">
             <a:avLst/>
@@ -4233,8 +4233,8 @@
         </p:nvSpPr>
         <p:spPr>
           <a:xfrm>
-            <a:off x="3481577" y="3337560"/>
-            <a:ext cx="2338578" cy="457200"/>
+            <a:off x="3481577" y="3154680"/>
+            <a:ext cx="2338578" cy="411480"/>
           </a:xfrm>
           <a:prstGeom prst="rect">
             <a:avLst/>
@@ -4426,8 +4426,8 @@
         </p:nvSpPr>
         <p:spPr>
           <a:xfrm>
-            <a:off x="6368796" y="3337560"/>
-            <a:ext cx="2338578" cy="457200"/>
+            <a:off x="6368796" y="3154680"/>
+            <a:ext cx="2338578" cy="411480"/>
           </a:xfrm>
           <a:prstGeom prst="rect">
             <a:avLst/>
@@ -4619,8 +4619,8 @@
         </p:nvSpPr>
         <p:spPr>
           <a:xfrm>
-            <a:off x="9256014" y="3337560"/>
-            <a:ext cx="2338578" cy="457200"/>
+            <a:off x="9256014" y="3154680"/>
+            <a:ext cx="2338578" cy="411480"/>
           </a:xfrm>
           <a:prstGeom prst="rect">
             <a:avLst/>
